--- a/src/Treinamento basico em java.pptx
+++ b/src/Treinamento basico em java.pptx
@@ -9900,10 +9900,11 @@
           <a:lstStyle/>
           <a:p>
             <a:r>
-              <a:rPr lang="pt-BR" sz="3200" dirty="0">
+              <a:rPr lang="pt-BR" sz="3200" b="1" dirty="0">
                 <a:solidFill>
                   <a:schemeClr val="accent2"/>
                 </a:solidFill>
+                <a:latin typeface="+mn-lt"/>
               </a:rPr>
               <a:t>Estrutura de repetição</a:t>
             </a:r>
@@ -10258,10 +10259,11 @@
           <a:lstStyle/>
           <a:p>
             <a:r>
-              <a:rPr lang="pt-BR" sz="3200" dirty="0">
+              <a:rPr lang="pt-BR" sz="3200" b="1" dirty="0">
                 <a:solidFill>
                   <a:schemeClr val="accent2"/>
                 </a:solidFill>
+                <a:latin typeface="+mn-lt"/>
               </a:rPr>
               <a:t>Aula 3</a:t>
             </a:r>
@@ -10409,10 +10411,11 @@
           <a:lstStyle/>
           <a:p>
             <a:r>
-              <a:rPr lang="pt-BR" sz="3200" dirty="0">
+              <a:rPr lang="pt-BR" sz="3200" b="1" dirty="0">
                 <a:solidFill>
                   <a:schemeClr val="accent2"/>
                 </a:solidFill>
+                <a:latin typeface="+mn-lt"/>
               </a:rPr>
               <a:t>Funções e métodos</a:t>
             </a:r>
@@ -10683,10 +10686,11 @@
           <a:lstStyle/>
           <a:p>
             <a:r>
-              <a:rPr lang="pt-BR" sz="3200" dirty="0">
+              <a:rPr lang="pt-BR" sz="3200" b="1" dirty="0">
                 <a:solidFill>
                   <a:schemeClr val="accent2"/>
                 </a:solidFill>
+                <a:latin typeface="+mn-lt"/>
               </a:rPr>
               <a:t>Classes e Objetos</a:t>
             </a:r>
@@ -10917,10 +10921,11 @@
           <a:lstStyle/>
           <a:p>
             <a:r>
-              <a:rPr lang="pt-BR" sz="3200" dirty="0">
+              <a:rPr lang="pt-BR" sz="3200" b="1" dirty="0">
                 <a:solidFill>
                   <a:schemeClr val="accent2"/>
                 </a:solidFill>
+                <a:latin typeface="+mn-lt"/>
               </a:rPr>
               <a:t>Herança</a:t>
             </a:r>
@@ -11268,40 +11273,100 @@
           <a:bodyPr/>
           <a:lstStyle/>
           <a:p>
-            <a:pPr marL="0" indent="0"/>
-            <a:r>
-              <a:rPr lang="pt-BR" sz="2000" dirty="0"/>
+            <a:r>
+              <a:rPr lang="pt-BR" sz="1600" dirty="0">
+                <a:latin typeface="+mn-lt"/>
+                <a:ea typeface="+mn-ea"/>
+                <a:cs typeface="+mn-cs"/>
+              </a:rPr>
               <a:t>Apresentar os fundamentos de Java: tipos de dados, operações, entrada de dados, estruturas de controle (condicionais e repetição), funções e conceitos básicos de programação orientada a objetos (classes e herança).</a:t>
             </a:r>
             <a:br>
-              <a:rPr lang="pt-BR" sz="2000" dirty="0"/>
+              <a:rPr lang="pt-BR" sz="1600" dirty="0">
+                <a:latin typeface="+mn-lt"/>
+                <a:ea typeface="+mn-ea"/>
+                <a:cs typeface="+mn-cs"/>
+              </a:rPr>
             </a:br>
             <a:br>
-              <a:rPr lang="pt-BR" sz="2000" dirty="0"/>
+              <a:rPr lang="pt-BR" sz="1600" dirty="0">
+                <a:latin typeface="+mn-lt"/>
+                <a:ea typeface="+mn-ea"/>
+                <a:cs typeface="+mn-cs"/>
+              </a:rPr>
             </a:br>
             <a:r>
-              <a:rPr lang="pt-BR" sz="2000" dirty="0"/>
+              <a:rPr lang="pt-BR" sz="1600" dirty="0">
+                <a:latin typeface="+mn-lt"/>
+                <a:ea typeface="+mn-ea"/>
+                <a:cs typeface="+mn-cs"/>
+              </a:rPr>
               <a:t>Estrutura do treinamento</a:t>
             </a:r>
             <a:br>
-              <a:rPr lang="pt-BR" sz="2000" dirty="0"/>
+              <a:rPr lang="pt-BR" sz="1600" dirty="0">
+                <a:latin typeface="+mn-lt"/>
+                <a:ea typeface="+mn-ea"/>
+                <a:cs typeface="+mn-cs"/>
+              </a:rPr>
             </a:br>
-            <a:r>
-              <a:rPr lang="pt-BR" sz="2000" dirty="0"/>
+            <a:br>
+              <a:rPr lang="pt-BR" sz="1600" dirty="0">
+                <a:latin typeface="+mn-lt"/>
+                <a:ea typeface="+mn-ea"/>
+                <a:cs typeface="+mn-cs"/>
+              </a:rPr>
+            </a:br>
+            <a:r>
+              <a:rPr lang="pt-BR" sz="1600" dirty="0">
+                <a:latin typeface="+mn-lt"/>
+                <a:ea typeface="+mn-ea"/>
+                <a:cs typeface="+mn-cs"/>
+              </a:rPr>
               <a:t>Aula 1: Tipos, variáveis, operações, Scanner e exercícios </a:t>
             </a:r>
             <a:br>
-              <a:rPr lang="pt-BR" sz="2000" dirty="0"/>
+              <a:rPr lang="pt-BR" sz="1600" dirty="0">
+                <a:latin typeface="+mn-lt"/>
+                <a:ea typeface="+mn-ea"/>
+                <a:cs typeface="+mn-cs"/>
+              </a:rPr>
             </a:br>
-            <a:r>
-              <a:rPr lang="pt-BR" sz="2000" dirty="0"/>
+            <a:br>
+              <a:rPr lang="pt-BR" sz="1600" dirty="0">
+                <a:latin typeface="+mn-lt"/>
+                <a:ea typeface="+mn-ea"/>
+                <a:cs typeface="+mn-cs"/>
+              </a:rPr>
+            </a:br>
+            <a:r>
+              <a:rPr lang="pt-BR" sz="1600" dirty="0">
+                <a:latin typeface="+mn-lt"/>
+                <a:ea typeface="+mn-ea"/>
+                <a:cs typeface="+mn-cs"/>
+              </a:rPr>
               <a:t>Aula 2: Condicionais e estruturas de repetição</a:t>
             </a:r>
             <a:br>
-              <a:rPr lang="pt-BR" sz="2000" dirty="0"/>
+              <a:rPr lang="pt-BR" sz="1600" dirty="0">
+                <a:latin typeface="+mn-lt"/>
+                <a:ea typeface="+mn-ea"/>
+                <a:cs typeface="+mn-cs"/>
+              </a:rPr>
             </a:br>
-            <a:r>
-              <a:rPr lang="pt-BR" sz="2000" dirty="0"/>
+            <a:br>
+              <a:rPr lang="pt-BR" sz="1600" dirty="0">
+                <a:latin typeface="+mn-lt"/>
+                <a:ea typeface="+mn-ea"/>
+                <a:cs typeface="+mn-cs"/>
+              </a:rPr>
+            </a:br>
+            <a:r>
+              <a:rPr lang="pt-BR" sz="1600" dirty="0">
+                <a:latin typeface="+mn-lt"/>
+                <a:ea typeface="+mn-ea"/>
+                <a:cs typeface="+mn-cs"/>
+              </a:rPr>
               <a:t>Aula 3: Funções, classes e herança</a:t>
             </a:r>
             <a:br>
@@ -11505,10 +11570,11 @@
           <a:lstStyle/>
           <a:p>
             <a:r>
-              <a:rPr lang="pt-BR" sz="3200" dirty="0">
+              <a:rPr lang="pt-BR" sz="3200" b="1" dirty="0">
                 <a:solidFill>
                   <a:schemeClr val="accent2"/>
                 </a:solidFill>
+                <a:latin typeface="+mn-lt"/>
               </a:rPr>
               <a:t>Variáveis e Tipos Primitivos</a:t>
             </a:r>
@@ -11730,10 +11796,11 @@
           <a:lstStyle/>
           <a:p>
             <a:r>
-              <a:rPr lang="pt-BR" sz="3200" dirty="0">
+              <a:rPr lang="pt-BR" sz="3200" b="1" dirty="0">
                 <a:solidFill>
                   <a:schemeClr val="accent2"/>
                 </a:solidFill>
+                <a:latin typeface="+mn-lt"/>
               </a:rPr>
               <a:t>Variáveis e Tipos Primitivos</a:t>
             </a:r>
@@ -12078,10 +12145,11 @@
           <a:lstStyle/>
           <a:p>
             <a:r>
-              <a:rPr lang="pt-BR" sz="3200" dirty="0">
+              <a:rPr lang="pt-BR" sz="3200" b="1" dirty="0">
                 <a:solidFill>
                   <a:schemeClr val="accent2"/>
                 </a:solidFill>
+                <a:latin typeface="+mn-lt"/>
               </a:rPr>
               <a:t>Operações</a:t>
             </a:r>
@@ -12347,10 +12415,11 @@
           <a:lstStyle/>
           <a:p>
             <a:r>
-              <a:rPr lang="pt-BR" sz="3200" dirty="0">
+              <a:rPr lang="pt-BR" sz="3200" b="1" dirty="0">
                 <a:solidFill>
                   <a:schemeClr val="accent2"/>
                 </a:solidFill>
+                <a:latin typeface="+mn-lt"/>
               </a:rPr>
               <a:t>Entradas de dados com Scanner</a:t>
             </a:r>
@@ -12715,10 +12784,11 @@
           <a:lstStyle/>
           <a:p>
             <a:r>
-              <a:rPr lang="pt-BR" sz="3200" dirty="0">
+              <a:rPr lang="pt-BR" sz="3200" b="1" dirty="0">
                 <a:solidFill>
                   <a:schemeClr val="accent2"/>
                 </a:solidFill>
+                <a:latin typeface="+mn-lt"/>
               </a:rPr>
               <a:t>Aula 2</a:t>
             </a:r>
@@ -12866,10 +12936,11 @@
           <a:lstStyle/>
           <a:p>
             <a:r>
-              <a:rPr lang="pt-BR" sz="3200" dirty="0">
+              <a:rPr lang="pt-BR" sz="3200" b="1" dirty="0">
                 <a:solidFill>
                   <a:schemeClr val="accent2"/>
                 </a:solidFill>
+                <a:latin typeface="+mn-lt"/>
               </a:rPr>
               <a:t>Estruturas condicionais</a:t>
             </a:r>
@@ -13193,10 +13264,11 @@
           <a:lstStyle/>
           <a:p>
             <a:r>
-              <a:rPr lang="pt-BR" sz="3200" dirty="0">
+              <a:rPr lang="pt-BR" sz="3200" b="1" dirty="0">
                 <a:solidFill>
                   <a:schemeClr val="accent2"/>
                 </a:solidFill>
+                <a:latin typeface="+mn-lt"/>
               </a:rPr>
               <a:t>Estruturas condicionais</a:t>
             </a:r>
@@ -13932,6 +14004,15 @@
 </file>
 
 <file path=customXml/item1.xml><?xml version="1.0" encoding="utf-8"?>
+<?mso-contentType ?>
+<FormTemplates xmlns="http://schemas.microsoft.com/sharepoint/v3/contenttype/forms">
+  <Display>DocumentLibraryForm</Display>
+  <Edit>DocumentLibraryForm</Edit>
+  <New>DocumentLibraryForm</New>
+</FormTemplates>
+</file>
+
+<file path=customXml/item2.xml><?xml version="1.0" encoding="utf-8"?>
 <ct:contentTypeSchema xmlns:ct="http://schemas.microsoft.com/office/2006/metadata/contentType" xmlns:ma="http://schemas.microsoft.com/office/2006/metadata/properties/metaAttributes" ct:_="" ma:_="" ma:contentTypeName="Documento" ma:contentTypeID="0x010100C0FB9B8F91C0234294F5514D67C2B6C2" ma:contentTypeVersion="18" ma:contentTypeDescription="Crear nuevo documento." ma:contentTypeScope="" ma:versionID="4fa456b0aa022484d66325f480042e8d">
   <xsd:schema xmlns:xsd="http://www.w3.org/2001/XMLSchema" xmlns:xs="http://www.w3.org/2001/XMLSchema" xmlns:p="http://schemas.microsoft.com/office/2006/metadata/properties" xmlns:ns3="fcfb303e-fe19-4aa2-a59a-4027135578fc" xmlns:ns4="62d238fc-7621-40af-b280-4f368df641db" targetNamespace="http://schemas.microsoft.com/office/2006/metadata/properties" ma:root="true" ma:fieldsID="563fe4b2603e5b4cece8514f3b757866" ns3:_="" ns4:_="">
     <xsd:import namespace="fcfb303e-fe19-4aa2-a59a-4027135578fc"/>
@@ -14184,15 +14265,6 @@
 </ct:contentTypeSchema>
 </file>
 
-<file path=customXml/item2.xml><?xml version="1.0" encoding="utf-8"?>
-<?mso-contentType ?>
-<FormTemplates xmlns="http://schemas.microsoft.com/sharepoint/v3/contenttype/forms">
-  <Display>DocumentLibraryForm</Display>
-  <Edit>DocumentLibraryForm</Edit>
-  <New>DocumentLibraryForm</New>
-</FormTemplates>
-</file>
-
 <file path=customXml/item3.xml><?xml version="1.0" encoding="utf-8"?>
 <p:properties xmlns:p="http://schemas.microsoft.com/office/2006/metadata/properties" xmlns:xsi="http://www.w3.org/2001/XMLSchema-instance" xmlns:pc="http://schemas.microsoft.com/office/infopath/2007/PartnerControls">
   <documentManagement>
@@ -14202,6 +14274,14 @@
 </file>
 
 <file path=customXml/itemProps1.xml><?xml version="1.0" encoding="utf-8"?>
+<ds:datastoreItem xmlns:ds="http://schemas.openxmlformats.org/officeDocument/2006/customXml" ds:itemID="{22516C70-0223-402C-AB9A-006FE9D369D6}">
+  <ds:schemaRefs>
+    <ds:schemaRef ds:uri="http://schemas.microsoft.com/sharepoint/v3/contenttype/forms"/>
+  </ds:schemaRefs>
+</ds:datastoreItem>
+</file>
+
+<file path=customXml/itemProps2.xml><?xml version="1.0" encoding="utf-8"?>
 <ds:datastoreItem xmlns:ds="http://schemas.openxmlformats.org/officeDocument/2006/customXml" ds:itemID="{D08B5CC4-B865-48FF-B51D-A6CB94C99701}">
   <ds:schemaRefs>
     <ds:schemaRef ds:uri="http://schemas.microsoft.com/office/2006/metadata/contentType"/>
@@ -14216,14 +14296,6 @@
     <ds:schemaRef ds:uri="http://purl.org/dc/elements/1.1/"/>
     <ds:schemaRef ds:uri="http://purl.org/dc/terms/"/>
     <ds:schemaRef ds:uri="http://schemas.microsoft.com/internal/obd"/>
-  </ds:schemaRefs>
-</ds:datastoreItem>
-</file>
-
-<file path=customXml/itemProps2.xml><?xml version="1.0" encoding="utf-8"?>
-<ds:datastoreItem xmlns:ds="http://schemas.openxmlformats.org/officeDocument/2006/customXml" ds:itemID="{22516C70-0223-402C-AB9A-006FE9D369D6}">
-  <ds:schemaRefs>
-    <ds:schemaRef ds:uri="http://schemas.microsoft.com/sharepoint/v3/contenttype/forms"/>
   </ds:schemaRefs>
 </ds:datastoreItem>
 </file>
